--- a/cardDesign.pptx
+++ b/cardDesign.pptx
@@ -34559,7 +34559,13 @@
               <a:rPr lang="ja-JP" altLang="en-US" dirty="0"/>
               <a:t>等のカードケーススリーブが使えるはずです。</a:t>
             </a:r>
-            <a:endParaRPr kumimoji="1" lang="ja-JP" altLang="en-US" dirty="0"/>
+            <a:endParaRPr lang="en-US" altLang="ja-JP" dirty="0"/>
+          </a:p>
+          <a:p>
+            <a:r>
+              <a:rPr kumimoji="1" lang="ja-JP" altLang="en-US" dirty="0"/>
+              <a:t>こちらは後程作成します。</a:t>
+            </a:r>
           </a:p>
         </p:txBody>
       </p:sp>
